--- a/deck/v3/termini-deck-v3.pptx
+++ b/deck/v3/termini-deck-v3.pptx
@@ -5606,7 +5606,7 @@
                 </a:solidFill>
                 <a:latin typeface="Arial"/>
               </a:rPr>
-              <a:t>Future of Work &amp; Enterprise Productivity — every organisation should be able to run AI on data it cannot send to a cloud.</a:t>
+              <a:t>Future of Work &amp; Enterprise Productivity. Every organisation should be able to run AI on data it cannot send to a cloud.</a:t>
             </a:r>
           </a:p>
         </p:txBody>
@@ -6441,7 +6441,7 @@
                 </a:solidFill>
                 <a:latin typeface="Arial"/>
               </a:rPr>
-              <a:t>Substrate and channel — adopted, not invented</a:t>
+              <a:t>Substrate and channel: adopted, not invented</a:t>
             </a:r>
           </a:p>
           <a:p>
@@ -6498,7 +6498,7 @@
                 </a:solidFill>
                 <a:latin typeface="Arial"/>
               </a:rPr>
-              <a:t>Boundary and loop — the two things we build</a:t>
+              <a:t>Boundary and loop: the two things we build</a:t>
             </a:r>
           </a:p>
           <a:p>
@@ -6592,7 +6592,7 @@
                 </a:solidFill>
                 <a:latin typeface="Arial"/>
               </a:rPr>
-              <a:t>We don't certify you — we generate the evidence a certification asks for, continuously.</a:t>
+              <a:t>We don't certify anyone. We generate the evidence a certification asks for, continuously.</a:t>
             </a:r>
           </a:p>
         </p:txBody>
@@ -6968,7 +6968,7 @@
                           </a:solidFill>
                           <a:latin typeface="Arial"/>
                         </a:rPr>
-                        <a:t>Yes — allowlisted</a:t>
+                        <a:t>Yes, allowlisted</a:t>
                       </a:r>
                     </a:p>
                   </a:txBody>
@@ -7078,7 +7078,7 @@
                           </a:solidFill>
                           <a:latin typeface="Arial"/>
                         </a:rPr>
-                        <a:t>Yes — transformed</a:t>
+                        <a:t>Yes, transformed</a:t>
                       </a:r>
                     </a:p>
                   </a:txBody>
@@ -7289,7 +7289,7 @@
                 </a:solidFill>
                 <a:latin typeface="Arial"/>
               </a:rPr>
-              <a:t>The one external call — disclosed</a:t>
+              <a:t>The one external call, disclosed</a:t>
             </a:r>
           </a:p>
           <a:p>
@@ -7362,7 +7362,7 @@
                 </a:solidFill>
                 <a:latin typeface="Arial"/>
               </a:rPr>
-              <a:t>A boundary you cannot see is not a boundary. The claim is not “nothing leaves” — it is “nothing C2 leaves, and everything that does is named and audited.”</a:t>
+              <a:t>A boundary you cannot see is not a boundary. The claim is “nothing C2 leaves, and everything that does is named, classified and audited.”</a:t>
             </a:r>
           </a:p>
         </p:txBody>
@@ -7608,7 +7608,7 @@
                 </a:solidFill>
                 <a:latin typeface="Arial"/>
               </a:rPr>
-              <a:t>The diagnosis — naming the remediation from C0 telemetry. Measured 1.8 s warm. The only call that leaves the premises, and it says so in the audit trail.</a:t>
+              <a:t>The diagnosis: naming the remediation from C0 telemetry. Measured 1.8 s warm. The only call that leaves the premises, and it says so in the audit trail.</a:t>
             </a:r>
           </a:p>
         </p:txBody>
@@ -7665,7 +7665,7 @@
                 </a:solidFill>
                 <a:latin typeface="Arial"/>
               </a:rPr>
-              <a:t>Google's open weights, served by llama.cpp. Automatically detects the inference node, bootstraps the toolchain and leaves it ready for agents — nothing forwarded.</a:t>
+              <a:t>Google's open weights, served by llama.cpp. Automatically detects the inference node, bootstraps the toolchain and leaves it ready for agents, with nothing forwarded.</a:t>
             </a:r>
           </a:p>
         </p:txBody>
@@ -7722,7 +7722,7 @@
                 </a:solidFill>
                 <a:latin typeface="Arial"/>
               </a:rPr>
-              <a:t>The same Gemma on 1× L4 with vLLM — deployed as the managed reference and the shape this takes when GPU quota stops being the blocker.</a:t>
+              <a:t>The same Gemma on 1× L4 with vLLM, deployed as the managed reference. It is the shape this takes when GPU quota stops being the blocker.</a:t>
             </a:r>
           </a:p>
         </p:txBody>
@@ -8076,7 +8076,7 @@
                 </a:solidFill>
                 <a:latin typeface="Arial"/>
               </a:rPr>
-              <a:t>Node registration from the pre-baked image — zero installs at boot</a:t>
+              <a:t>Node registration from the pre-baked image, with zero installs at boot</a:t>
             </a:r>
           </a:p>
         </p:txBody>
@@ -8154,7 +8154,7 @@
                 </a:solidFill>
                 <a:latin typeface="Arial"/>
               </a:rPr>
-              <a:t>C2 payloads the controller has ever stored — fail-closed by design</a:t>
+              <a:t>C2 payloads the controller has ever stored. Fail-closed by design.</a:t>
             </a:r>
           </a:p>
         </p:txBody>
@@ -8388,7 +8388,7 @@
                 </a:solidFill>
                 <a:latin typeface="Arial"/>
               </a:rPr>
-              <a:t>Diagnosis warm on the managed path — 402 s on local CPU weights, stated not hidden</a:t>
+              <a:t>Diagnosis warm on the managed path. 402 s on local CPU weights, stated not hidden.</a:t>
             </a:r>
           </a:p>
         </p:txBody>
@@ -8466,7 +8466,7 @@
                 </a:solidFill>
                 <a:latin typeface="Arial"/>
               </a:rPr>
-              <a:t>On GCE + Firebase + Vertex AI — a judge can open it and watch</a:t>
+              <a:t>On GCE + Firebase + Vertex AI. A judge can open it and watch.</a:t>
             </a:r>
           </a:p>
         </p:txBody>
@@ -8861,7 +8861,7 @@
                 </a:solidFill>
                 <a:latin typeface="Arial"/>
               </a:rPr>
-              <a:t>termini-510609.web.app — the demo is paused between judging sessions; the resume command is in SUBMISSION.md §3.</a:t>
+              <a:t>termini-510609.web.app. The demo is paused between judging sessions; the resume command is in SUBMISSION.md §3.</a:t>
             </a:r>
           </a:p>
         </p:txBody>
@@ -9284,7 +9284,7 @@
                 </a:solidFill>
                 <a:latin typeface="Arial"/>
               </a:rPr>
-              <a:t>Edge anomaly detection replacing static thresholds — the operator learns each site's normal.</a:t>
+              <a:t>Edge anomaly detection replacing static thresholds, so the operator learns each site's normal.</a:t>
             </a:r>
           </a:p>
         </p:txBody>
@@ -9864,7 +9864,7 @@
                 </a:solidFill>
                 <a:latin typeface="Arial"/>
               </a:rPr>
-              <a:t>script ready — recording is the pending human step (SUBMISSION.md §5)</a:t>
+              <a:t>script ready; recording is the pending human step (SUBMISSION.md §5)</a:t>
             </a:r>
           </a:p>
         </p:txBody>
@@ -10469,7 +10469,7 @@
                 </a:solidFill>
                 <a:latin typeface="Arial"/>
               </a:rPr>
-              <a:t>A dental clinic in Korea wanted AI for its phones, its insurance claims and its own reporting. Sending patient data to a cloud was not an option — so the owner, a biology graduate rather than a computer scientist, built the infrastructure himself.</a:t>
+              <a:t>A dental clinic in Korea wanted AI for its phones, its insurance claims and its own reporting. Sending patient data to a cloud was not an option, so the owner built the infrastructure himself. He studied biology, not computer science.</a:t>
             </a:r>
           </a:p>
         </p:txBody>
@@ -10592,7 +10592,7 @@
                 </a:solidFill>
                 <a:latin typeface="Arial"/>
               </a:rPr>
-              <a:t>Phones, insurance claims, reporting and document retrieval — all running on models in the same room as the chair.</a:t>
+              <a:t>Phones, insurance claims, reporting and document retrieval all run on models in the same room as the chair.</a:t>
             </a:r>
           </a:p>
         </p:txBody>
@@ -10670,7 +10670,7 @@
                 </a:solidFill>
                 <a:latin typeface="Arial"/>
               </a:rPr>
-              <a:t>of evenings, on top of dentistry — the cost of there being no product</a:t>
+              <a:t>of evenings, on top of dentistry. That is what it costs when no product exists.</a:t>
             </a:r>
           </a:p>
         </p:txBody>
@@ -10849,7 +10849,7 @@
                 </a:solidFill>
                 <a:latin typeface="Arial"/>
               </a:rPr>
-              <a:t> — “A neighbourhood dental clinic's AX transformation”, 13 Oct 2026</a:t>
+              <a:t>. “A neighbourhood dental clinic's AX transformation”, 13 Oct 2026</a:t>
             </a:r>
           </a:p>
         </p:txBody>
@@ -11077,7 +11077,7 @@
                 </a:solidFill>
                 <a:latin typeface="Arial"/>
               </a:rPr>
-              <a:t>The clinic's rule is not a dental rule — it is the rule of every business whose best data is also its most restricted.</a:t>
+              <a:t>The clinic is not unusual. Every business whose best data is also its most restricted lives by something like it.</a:t>
             </a:r>
           </a:p>
         </p:txBody>
@@ -11775,7 +11775,7 @@
                 </a:solidFill>
                 <a:latin typeface="Arial"/>
               </a:rPr>
-              <a:t> of firms use AI somewhere (McKinsey 2025) — permission, operations and context are missing at once.</a:t>
+              <a:t> of firms use AI somewhere (McKinsey 2025). Permission, operations and context are missing at once.</a:t>
             </a:r>
           </a:p>
         </p:txBody>
@@ -12175,7 +12175,7 @@
                 </a:solidFill>
                 <a:latin typeface="Arial"/>
               </a:rPr>
-              <a:t>“Data is transmitted and stored to an external server, making it impossible for the company to retrieve it.” — Samsung memo</a:t>
+              <a:t>“Data is transmitted and stored to an external server, making it impossible for the company to retrieve it.”. Samsung internal memo</a:t>
             </a:r>
           </a:p>
           <a:p>
@@ -12280,7 +12280,7 @@
                 </a:solidFill>
                 <a:latin typeface="Arial"/>
               </a:rPr>
-              <a:t>Not a breach of the model — a copy of every conversation, reachable from the open internet.</a:t>
+              <a:t>The model was never breached. A copy of every conversation sat open on the internet.</a:t>
             </a:r>
           </a:p>
           <a:p>
@@ -12385,7 +12385,7 @@
                 </a:solidFill>
                 <a:latin typeface="Arial"/>
               </a:rPr>
-              <a:t>A Millennium Prize result — and a priority dispute about whose work the model had read.</a:t>
+              <a:t>A Millennium Prize result, and a priority dispute about whose work the model had read.</a:t>
             </a:r>
           </a:p>
           <a:p>
@@ -12449,7 +12449,7 @@
                 </a:solidFill>
                 <a:latin typeface="Arial"/>
               </a:rPr>
-              <a:t>not a better policy, but a topology where the copy never leaves — C2 stays on the node, and what does leave is named, classified and audited.</a:t>
+              <a:t>a topology where the copy never leaves. C2 stays on the node, and what does leave is named, classified and audited.</a:t>
             </a:r>
           </a:p>
         </p:txBody>
@@ -12690,7 +12690,7 @@
         </p:nvSpPr>
         <p:spPr>
           <a:xfrm>
-            <a:off x="265176" y="1700784"/>
+            <a:off x="265176" y="1828800"/>
             <a:ext cx="1572768" cy="457200"/>
           </a:xfrm>
           <a:prstGeom prst="roundRect">
@@ -12781,7 +12781,7 @@
         </p:nvSpPr>
         <p:spPr>
           <a:xfrm>
-            <a:off x="2039112" y="1700784"/>
+            <a:off x="2039112" y="1828800"/>
             <a:ext cx="1572768" cy="457200"/>
           </a:xfrm>
           <a:prstGeom prst="roundRect">
@@ -12872,7 +12872,7 @@
         </p:nvSpPr>
         <p:spPr>
           <a:xfrm>
-            <a:off x="3813048" y="1700784"/>
+            <a:off x="3813048" y="1828800"/>
             <a:ext cx="1572768" cy="457200"/>
           </a:xfrm>
           <a:prstGeom prst="roundRect">
@@ -12963,7 +12963,7 @@
         </p:nvSpPr>
         <p:spPr>
           <a:xfrm>
-            <a:off x="5586984" y="1700784"/>
+            <a:off x="5586984" y="1828800"/>
             <a:ext cx="1572768" cy="457200"/>
           </a:xfrm>
           <a:prstGeom prst="roundRect">
@@ -13054,7 +13054,7 @@
         </p:nvSpPr>
         <p:spPr>
           <a:xfrm>
-            <a:off x="7360919" y="1700784"/>
+            <a:off x="7360919" y="1828800"/>
             <a:ext cx="1572768" cy="457200"/>
           </a:xfrm>
           <a:prstGeom prst="roundRect">
@@ -13101,32 +13101,18 @@
         </p:nvCxnSpPr>
         <p:spPr>
           <a:xfrm>
-            <a:off x="8357616" y="2157984"/>
-            <a:ext cx="0" cy="237744"/>
+            <a:off x="8357616" y="2286000"/>
+            <a:ext cx="0" cy="219456"/>
           </a:xfrm>
           <a:prstGeom prst="line">
             <a:avLst/>
           </a:prstGeom>
-          <a:ln w="15875">
+          <a:ln w="12700">
             <a:solidFill>
               <a:srgbClr val="BDC1C6"/>
             </a:solidFill>
           </a:ln>
         </p:spPr>
-        <p:style>
-          <a:lnRef idx="2">
-            <a:schemeClr val="accent1"/>
-          </a:lnRef>
-          <a:fillRef idx="0">
-            <a:schemeClr val="accent1"/>
-          </a:fillRef>
-          <a:effectRef idx="1">
-            <a:schemeClr val="accent1"/>
-          </a:effectRef>
-          <a:fontRef idx="minor">
-            <a:schemeClr val="tx1"/>
-          </a:fontRef>
-        </p:style>
       </p:cxnSp>
       <p:cxnSp>
         <p:nvCxnSpPr>
@@ -13136,33 +13122,19 @@
         </p:nvCxnSpPr>
         <p:spPr>
           <a:xfrm flipH="1">
-            <a:off x="6355080" y="2395728"/>
+            <a:off x="6355080" y="2505456"/>
             <a:ext cx="2002536" cy="0"/>
           </a:xfrm>
           <a:prstGeom prst="line">
             <a:avLst/>
           </a:prstGeom>
-          <a:ln w="15875">
+          <a:ln w="12700">
             <a:solidFill>
               <a:srgbClr val="BDC1C6"/>
             </a:solidFill>
             <a:prstDash val="dash"/>
           </a:ln>
         </p:spPr>
-        <p:style>
-          <a:lnRef idx="2">
-            <a:schemeClr val="accent1"/>
-          </a:lnRef>
-          <a:fillRef idx="0">
-            <a:schemeClr val="accent1"/>
-          </a:fillRef>
-          <a:effectRef idx="1">
-            <a:schemeClr val="accent1"/>
-          </a:effectRef>
-          <a:fontRef idx="minor">
-            <a:schemeClr val="tx1"/>
-          </a:fontRef>
-        </p:style>
       </p:cxnSp>
       <p:cxnSp>
         <p:nvCxnSpPr>
@@ -13172,32 +13144,18 @@
         </p:nvCxnSpPr>
         <p:spPr>
           <a:xfrm>
-            <a:off x="1051560" y="2157984"/>
-            <a:ext cx="0" cy="237744"/>
+            <a:off x="1051560" y="2286000"/>
+            <a:ext cx="0" cy="219456"/>
           </a:xfrm>
           <a:prstGeom prst="line">
             <a:avLst/>
           </a:prstGeom>
-          <a:ln w="15875">
+          <a:ln w="12700">
             <a:solidFill>
               <a:srgbClr val="BDC1C6"/>
             </a:solidFill>
           </a:ln>
         </p:spPr>
-        <p:style>
-          <a:lnRef idx="2">
-            <a:schemeClr val="accent1"/>
-          </a:lnRef>
-          <a:fillRef idx="0">
-            <a:schemeClr val="accent1"/>
-          </a:fillRef>
-          <a:effectRef idx="1">
-            <a:schemeClr val="accent1"/>
-          </a:effectRef>
-          <a:fontRef idx="minor">
-            <a:schemeClr val="tx1"/>
-          </a:fontRef>
-        </p:style>
       </p:cxnSp>
       <p:cxnSp>
         <p:nvCxnSpPr>
@@ -13207,33 +13165,19 @@
         </p:nvCxnSpPr>
         <p:spPr>
           <a:xfrm flipH="1">
-            <a:off x="1051560" y="2395728"/>
+            <a:off x="1051560" y="2505456"/>
             <a:ext cx="2148840" cy="0"/>
           </a:xfrm>
           <a:prstGeom prst="line">
             <a:avLst/>
           </a:prstGeom>
-          <a:ln w="15875">
+          <a:ln w="12700">
             <a:solidFill>
               <a:srgbClr val="BDC1C6"/>
             </a:solidFill>
             <a:prstDash val="dash"/>
           </a:ln>
         </p:spPr>
-        <p:style>
-          <a:lnRef idx="2">
-            <a:schemeClr val="accent1"/>
-          </a:lnRef>
-          <a:fillRef idx="0">
-            <a:schemeClr val="accent1"/>
-          </a:fillRef>
-          <a:effectRef idx="1">
-            <a:schemeClr val="accent1"/>
-          </a:effectRef>
-          <a:fontRef idx="minor">
-            <a:schemeClr val="tx1"/>
-          </a:fontRef>
-        </p:style>
       </p:cxnSp>
       <p:sp>
         <p:nvSpPr>
@@ -13243,7 +13187,7 @@
         </p:nvSpPr>
         <p:spPr>
           <a:xfrm>
-            <a:off x="3200400" y="2221992"/>
+            <a:off x="3200400" y="2331720"/>
             <a:ext cx="3154680" cy="347472"/>
           </a:xfrm>
           <a:prstGeom prst="roundRect">
@@ -13277,7 +13221,7 @@
                 </a:solidFill>
                 <a:latin typeface="Arial"/>
               </a:rPr>
-              <a:t>sovereign AI — the missing arc</a:t>
+              <a:t>sovereign AI: the missing arc</a:t>
             </a:r>
           </a:p>
         </p:txBody>
@@ -13290,7 +13234,7 @@
         </p:nvSpPr>
         <p:spPr>
           <a:xfrm>
-            <a:off x="265176" y="2852928"/>
+            <a:off x="265176" y="2962656"/>
             <a:ext cx="2761488" cy="1005840"/>
           </a:xfrm>
           <a:prstGeom prst="roundRect">
@@ -13347,7 +13291,7 @@
         </p:nvSpPr>
         <p:spPr>
           <a:xfrm>
-            <a:off x="3172968" y="2852928"/>
+            <a:off x="3172968" y="2962656"/>
             <a:ext cx="2761488" cy="1005840"/>
           </a:xfrm>
           <a:prstGeom prst="roundRect">
@@ -13404,7 +13348,7 @@
         </p:nvSpPr>
         <p:spPr>
           <a:xfrm>
-            <a:off x="6080760" y="2852928"/>
+            <a:off x="6080760" y="2962656"/>
             <a:ext cx="2761488" cy="1005840"/>
           </a:xfrm>
           <a:prstGeom prst="roundRect">
@@ -13461,7 +13405,7 @@
         </p:nvSpPr>
         <p:spPr>
           <a:xfrm>
-            <a:off x="265176" y="4114800"/>
+            <a:off x="265176" y="4224528"/>
             <a:ext cx="8613648" cy="457200"/>
           </a:xfrm>
           <a:prstGeom prst="rect">
@@ -13496,7 +13440,7 @@
                 </a:solidFill>
                 <a:latin typeface="Arial"/>
               </a:rPr>
-              <a:t>Governance is not the tax on the loop — it is what closes it.</a:t>
+              <a:t>Governance is what makes the loop close.</a:t>
             </a:r>
           </a:p>
         </p:txBody>
@@ -13724,7 +13668,7 @@
                 </a:solidFill>
                 <a:latin typeface="Arial"/>
               </a:rPr>
-              <a:t>Frontier models are not the answer to every task. They are the top of a ladder — and the product is the routing between the levels.</a:t>
+              <a:t>Most tasks do not need a frontier model. The product is a ladder, and the routing between its levels.</a:t>
             </a:r>
           </a:p>
         </p:txBody>
@@ -14167,7 +14111,7 @@
                           </a:solidFill>
                           <a:latin typeface="Arial"/>
                         </a:rPr>
-                        <a:t>The node — 4B class, llama.cpp</a:t>
+                        <a:t>The node: 4B class, llama.cpp</a:t>
                       </a:r>
                     </a:p>
                   </a:txBody>
@@ -14750,7 +14694,7 @@
                 </a:solidFill>
                 <a:latin typeface="Arial"/>
               </a:rPr>
-              <a:t>Local is not worse — it is the right level for most of the work.</a:t>
+              <a:t>Local is the right level for most of the work.</a:t>
             </a:r>
           </a:p>
         </p:txBody>
@@ -15278,7 +15222,7 @@
                 </a:solidFill>
                 <a:latin typeface="Arial"/>
               </a:rPr>
-              <a:t>One control plane, two buyers, one boundary — </a:t>
+              <a:t>One control plane, two buyers, one boundary, </a:t>
             </a:r>
             <a:r>
               <a:rPr sz="1200" b="1" i="0">
@@ -15677,7 +15621,7 @@
                 </a:solidFill>
                 <a:latin typeface="Arial"/>
               </a:rPr>
-              <a:t>An AI agent watches telemetry and makes decisions the way a data-centre operator would — restarting a runaway workload, stopping what will fill a disk — and falls back to a fixed rule when unsure.</a:t>
+              <a:t>An AI agent watches telemetry and makes the calls a data-centre operator would: restarting a runaway workload, stopping what will fill a disk. When it is unsure it falls back to a fixed rule.</a:t>
             </a:r>
           </a:p>
           <a:p>
@@ -16071,7 +16015,7 @@
         </p:nvSpPr>
         <p:spPr>
           <a:xfrm>
-            <a:off x="265176" y="1783080"/>
+            <a:off x="265176" y="1828800"/>
             <a:ext cx="1572768" cy="457200"/>
           </a:xfrm>
           <a:prstGeom prst="roundRect">
@@ -16162,7 +16106,7 @@
         </p:nvSpPr>
         <p:spPr>
           <a:xfrm>
-            <a:off x="2039112" y="1783080"/>
+            <a:off x="2039112" y="1828800"/>
             <a:ext cx="1572768" cy="457200"/>
           </a:xfrm>
           <a:prstGeom prst="roundRect">
@@ -16253,7 +16197,7 @@
         </p:nvSpPr>
         <p:spPr>
           <a:xfrm>
-            <a:off x="3813048" y="1783080"/>
+            <a:off x="3813048" y="1828800"/>
             <a:ext cx="1572768" cy="457200"/>
           </a:xfrm>
           <a:prstGeom prst="roundRect">
@@ -16344,7 +16288,7 @@
         </p:nvSpPr>
         <p:spPr>
           <a:xfrm>
-            <a:off x="5586984" y="1783080"/>
+            <a:off x="5586984" y="1828800"/>
             <a:ext cx="1572768" cy="457200"/>
           </a:xfrm>
           <a:prstGeom prst="roundRect">
@@ -16435,7 +16379,7 @@
         </p:nvSpPr>
         <p:spPr>
           <a:xfrm>
-            <a:off x="7360919" y="1783080"/>
+            <a:off x="7360919" y="1828800"/>
             <a:ext cx="1572768" cy="457200"/>
           </a:xfrm>
           <a:prstGeom prst="roundRect">
@@ -17006,7 +16950,7 @@
                 </a:solidFill>
                 <a:latin typeface="Arial"/>
               </a:rPr>
-              <a:t>Nothing is decided by a model that a person could not read back afterwards — and the deterministic path needs no model at all.</a:t>
+              <a:t>Nothing is decided by a model that a person could not read back afterwards. The deterministic path needs no model at all.</a:t>
             </a:r>
           </a:p>
         </p:txBody>

--- a/deck/v3/termini-deck-v3.pptx
+++ b/deck/v3/termini-deck-v3.pptx
@@ -5581,7 +5581,7 @@
                 </a:solidFill>
                 <a:latin typeface="Arial"/>
               </a:rPr>
-              <a:t>[to be filled]</a:t>
+              <a:t>Florentiana Yuwono</a:t>
             </a:r>
           </a:p>
           <a:p>
@@ -9720,8 +9720,8 @@
         </p:nvSpPr>
         <p:spPr>
           <a:xfrm>
-            <a:off x="265176" y="1828800"/>
-            <a:ext cx="3108960" cy="274320"/>
+            <a:off x="265176" y="1783080"/>
+            <a:ext cx="2377440" cy="274320"/>
           </a:xfrm>
           <a:prstGeom prst="rect">
             <a:avLst/>
@@ -9759,8 +9759,8 @@
         </p:nvSpPr>
         <p:spPr>
           <a:xfrm>
-            <a:off x="3474720" y="1828800"/>
-            <a:ext cx="5394960" cy="274320"/>
+            <a:off x="2697480" y="1783080"/>
+            <a:ext cx="6126480" cy="274320"/>
           </a:xfrm>
           <a:prstGeom prst="rect">
             <a:avLst/>
@@ -9799,8 +9799,8 @@
         </p:nvSpPr>
         <p:spPr>
           <a:xfrm>
-            <a:off x="265176" y="2487168"/>
-            <a:ext cx="3108960" cy="274320"/>
+            <a:off x="265176" y="2286000"/>
+            <a:ext cx="2377440" cy="274320"/>
           </a:xfrm>
           <a:prstGeom prst="rect">
             <a:avLst/>
@@ -9825,7 +9825,7 @@
                 </a:solidFill>
                 <a:latin typeface="Arial"/>
               </a:rPr>
-              <a:t>Demo video (3 minutes)</a:t>
+              <a:t>Final product link</a:t>
             </a:r>
           </a:p>
         </p:txBody>
@@ -9838,8 +9838,8 @@
         </p:nvSpPr>
         <p:spPr>
           <a:xfrm>
-            <a:off x="3474720" y="2487168"/>
-            <a:ext cx="5394960" cy="274320"/>
+            <a:off x="265176" y="2578608"/>
+            <a:ext cx="8613648" cy="228600"/>
           </a:xfrm>
           <a:prstGeom prst="rect">
             <a:avLst/>
@@ -9858,13 +9858,13 @@
               </a:lnSpc>
             </a:pPr>
             <a:r>
-              <a:rPr sz="1000" b="0">
-                <a:solidFill>
-                  <a:srgbClr val="B06000"/>
-                </a:solidFill>
-                <a:latin typeface="Arial"/>
-              </a:rPr>
-              <a:t>script ready; recording is the pending human step (SUBMISSION.md §5)</a:t>
+              <a:rPr sz="800" b="0">
+                <a:solidFill>
+                  <a:srgbClr val="5F6368"/>
+                </a:solidFill>
+                <a:latin typeface="Arial"/>
+              </a:rPr>
+              <a:t>opens the full dashboard: fleet, operator log, agents panel, synthetic nodes included</a:t>
             </a:r>
           </a:p>
         </p:txBody>
@@ -9877,8 +9877,65 @@
         </p:nvSpPr>
         <p:spPr>
           <a:xfrm>
-            <a:off x="265176" y="3145536"/>
-            <a:ext cx="3108960" cy="274320"/>
+            <a:off x="2697480" y="2852928"/>
+            <a:ext cx="6126480" cy="502920"/>
+          </a:xfrm>
+          <a:prstGeom prst="rect">
+            <a:avLst/>
+          </a:prstGeom>
+          <a:noFill/>
+        </p:spPr>
+        <p:txBody>
+          <a:bodyPr wrap="square" lIns="0" rIns="0" tIns="0" bIns="0" anchor="t">
+            <a:spAutoFit/>
+          </a:bodyPr>
+          <a:lstStyle/>
+          <a:p>
+            <a:pPr algn="l">
+              <a:lnSpc>
+                <a:spcPct val="135000"/>
+              </a:lnSpc>
+            </a:pPr>
+            <a:r>
+              <a:rPr sz="800" b="0">
+                <a:solidFill>
+                  <a:srgbClr val="1A73E8"/>
+                </a:solidFill>
+                <a:latin typeface="Arial"/>
+                <a:hlinkClick r:id="rId4"/>
+              </a:rPr>
+              <a:t>https://termini-510609.web.app/?apiBase=https%3A%2F%2F34-93-190-64.sslip.io%2Fv1</a:t>
+            </a:r>
+          </a:p>
+          <a:p>
+            <a:pPr algn="l">
+              <a:lnSpc>
+                <a:spcPct val="135000"/>
+              </a:lnSpc>
+            </a:pPr>
+            <a:r>
+              <a:rPr sz="800" b="0">
+                <a:solidFill>
+                  <a:srgbClr val="1A73E8"/>
+                </a:solidFill>
+                <a:latin typeface="Arial"/>
+                <a:hlinkClick r:id="rId4"/>
+              </a:rPr>
+              <a:t>&amp;projectId=01J0DEM0WARM000000000000AB&amp;synthetic=1&amp;dest=fleet</a:t>
+            </a:r>
+          </a:p>
+        </p:txBody>
+      </p:sp>
+      <p:sp>
+        <p:nvSpPr>
+          <p:cNvPr id="12" name="TextBox 11"/>
+          <p:cNvSpPr txBox="1"/>
+          <p:nvPr/>
+        </p:nvSpPr>
+        <p:spPr>
+          <a:xfrm>
+            <a:off x="265176" y="3611880"/>
+            <a:ext cx="2377440" cy="274320"/>
           </a:xfrm>
           <a:prstGeom prst="rect">
             <a:avLst/>
@@ -9903,21 +9960,21 @@
                 </a:solidFill>
                 <a:latin typeface="Arial"/>
               </a:rPr>
-              <a:t>Final product link</a:t>
-            </a:r>
-          </a:p>
-        </p:txBody>
-      </p:sp>
-      <p:sp>
-        <p:nvSpPr>
-          <p:cNvPr id="12" name="TextBox 11"/>
+              <a:t>Demo sign-in</a:t>
+            </a:r>
+          </a:p>
+        </p:txBody>
+      </p:sp>
+      <p:sp>
+        <p:nvSpPr>
+          <p:cNvPr id="13" name="TextBox 12"/>
           <p:cNvSpPr txBox="1"/>
           <p:nvPr/>
         </p:nvSpPr>
         <p:spPr>
           <a:xfrm>
-            <a:off x="3474720" y="3145536"/>
-            <a:ext cx="5394960" cy="274320"/>
+            <a:off x="2697480" y="3611880"/>
+            <a:ext cx="6126480" cy="274320"/>
           </a:xfrm>
           <a:prstGeom prst="rect">
             <a:avLst/>
@@ -9938,26 +9995,25 @@
             <a:r>
               <a:rPr sz="1000" b="0">
                 <a:solidFill>
-                  <a:srgbClr val="1A73E8"/>
-                </a:solidFill>
-                <a:latin typeface="Arial"/>
-                <a:hlinkClick r:id="rId4"/>
-              </a:rPr>
-              <a:t>termini-510609.web.app</a:t>
-            </a:r>
-          </a:p>
-        </p:txBody>
-      </p:sp>
-      <p:sp>
-        <p:nvSpPr>
-          <p:cNvPr id="13" name="TextBox 12"/>
+                  <a:srgbClr val="202124"/>
+                </a:solidFill>
+                <a:latin typeface="Arial"/>
+              </a:rPr>
+              <a:t>project token: demo-project-token</a:t>
+            </a:r>
+          </a:p>
+        </p:txBody>
+      </p:sp>
+      <p:sp>
+        <p:nvSpPr>
+          <p:cNvPr id="14" name="TextBox 13"/>
           <p:cNvSpPr txBox="1"/>
           <p:nvPr/>
         </p:nvSpPr>
         <p:spPr>
           <a:xfrm>
-            <a:off x="265176" y="3803904"/>
-            <a:ext cx="3108960" cy="274320"/>
+            <a:off x="2697480" y="3877056"/>
+            <a:ext cx="6126480" cy="274320"/>
           </a:xfrm>
           <a:prstGeom prst="rect">
             <a:avLst/>
@@ -9976,27 +10032,27 @@
               </a:lnSpc>
             </a:pPr>
             <a:r>
-              <a:rPr sz="1050" b="1">
-                <a:solidFill>
-                  <a:srgbClr val="202124"/>
-                </a:solidFill>
-                <a:latin typeface="Arial"/>
-              </a:rPr>
-              <a:t>Live API</a:t>
-            </a:r>
-          </a:p>
-        </p:txBody>
-      </p:sp>
-      <p:sp>
-        <p:nvSpPr>
-          <p:cNvPr id="14" name="TextBox 13"/>
+              <a:rPr sz="800" b="0">
+                <a:solidFill>
+                  <a:srgbClr val="5F6368"/>
+                </a:solidFill>
+                <a:latin typeface="Arial"/>
+              </a:rPr>
+              <a:t>the dashboard refuses a token inside a URL, so the token is printed here; paste it at Settings, then sign in</a:t>
+            </a:r>
+          </a:p>
+        </p:txBody>
+      </p:sp>
+      <p:sp>
+        <p:nvSpPr>
+          <p:cNvPr id="15" name="TextBox 14"/>
           <p:cNvSpPr txBox="1"/>
           <p:nvPr/>
         </p:nvSpPr>
         <p:spPr>
           <a:xfrm>
-            <a:off x="3474720" y="3803904"/>
-            <a:ext cx="5394960" cy="274320"/>
+            <a:off x="265176" y="4315968"/>
+            <a:ext cx="2377440" cy="274320"/>
           </a:xfrm>
           <a:prstGeom prst="rect">
             <a:avLst/>
@@ -10015,59 +10071,14 @@
               </a:lnSpc>
             </a:pPr>
             <a:r>
-              <a:rPr sz="1000" b="0">
-                <a:solidFill>
-                  <a:srgbClr val="1A73E8"/>
-                </a:solidFill>
-                <a:latin typeface="Arial"/>
-                <a:hlinkClick r:id="rId5"/>
-              </a:rPr>
-              <a:t>34-93-190-64.sslip.io/v1</a:t>
-            </a:r>
-          </a:p>
-        </p:txBody>
-      </p:sp>
-      <p:sp>
-        <p:nvSpPr>
-          <p:cNvPr id="15" name="Rectangle 14"/>
-          <p:cNvSpPr/>
-          <p:nvPr/>
-        </p:nvSpPr>
-        <p:spPr>
-          <a:xfrm>
-            <a:off x="265176" y="4526280"/>
-            <a:ext cx="8613648" cy="10972"/>
-          </a:xfrm>
-          <a:prstGeom prst="rect">
-            <a:avLst/>
-          </a:prstGeom>
-          <a:solidFill>
-            <a:srgbClr val="DADCE0"/>
-          </a:solidFill>
-          <a:ln>
-            <a:noFill/>
-          </a:ln>
-          <a:effectLst/>
-        </p:spPr>
-        <p:style>
-          <a:lnRef idx="1">
-            <a:schemeClr val="accent1"/>
-          </a:lnRef>
-          <a:fillRef idx="3">
-            <a:schemeClr val="accent1"/>
-          </a:fillRef>
-          <a:effectRef idx="2">
-            <a:schemeClr val="accent1"/>
-          </a:effectRef>
-          <a:fontRef idx="minor">
-            <a:schemeClr val="lt1"/>
-          </a:fontRef>
-        </p:style>
-        <p:txBody>
-          <a:bodyPr rtlCol="0" anchor="ctr"/>
-          <a:lstStyle/>
-          <a:p>
-            <a:pPr algn="l"/>
+              <a:rPr sz="1050" b="1">
+                <a:solidFill>
+                  <a:srgbClr val="202124"/>
+                </a:solidFill>
+                <a:latin typeface="Arial"/>
+              </a:rPr>
+              <a:t>Live API</a:t>
+            </a:r>
           </a:p>
         </p:txBody>
       </p:sp>
@@ -10079,8 +10090,8 @@
         </p:nvSpPr>
         <p:spPr>
           <a:xfrm>
-            <a:off x="265176" y="4617720"/>
-            <a:ext cx="8613648" cy="274320"/>
+            <a:off x="2697480" y="4315968"/>
+            <a:ext cx="6126480" cy="274320"/>
           </a:xfrm>
           <a:prstGeom prst="rect">
             <a:avLst/>
@@ -10099,13 +10110,14 @@
               </a:lnSpc>
             </a:pPr>
             <a:r>
-              <a:rPr sz="800" b="0">
-                <a:solidFill>
-                  <a:srgbClr val="9AA0A6"/>
-                </a:solidFill>
-                <a:latin typeface="Arial"/>
-              </a:rPr>
-              <a:t>The dashboard opens with no credential in the URL; sign in with the project token once (Settings → sign in).</a:t>
+              <a:rPr sz="1000" b="0">
+                <a:solidFill>
+                  <a:srgbClr val="1A73E8"/>
+                </a:solidFill>
+                <a:latin typeface="Arial"/>
+                <a:hlinkClick r:id="rId5"/>
+              </a:rPr>
+              <a:t>34-93-190-64.sslip.io/v1</a:t>
             </a:r>
           </a:p>
         </p:txBody>

--- a/deck/v3/termini-deck-v3.pptx
+++ b/deck/v3/termini-deck-v3.pptx
@@ -5686,7 +5686,7 @@
       <p:grpSpPr/>
       <p:pic>
         <p:nvPicPr>
-          <p:cNvPr id="2" name="Picture 1" descr="s3_0_png_8554.png"/>
+          <p:cNvPr id="2" name="Picture 1" descr="header-strip.png"/>
           <p:cNvPicPr>
             <a:picLocks noChangeAspect="1"/>
           </p:cNvPicPr>
@@ -6617,7 +6617,7 @@
       <p:grpSpPr/>
       <p:pic>
         <p:nvPicPr>
-          <p:cNvPr id="2" name="Picture 1" descr="s3_0_png_8554.png"/>
+          <p:cNvPr id="2" name="Picture 1" descr="header-strip.png"/>
           <p:cNvPicPr>
             <a:picLocks noChangeAspect="1"/>
           </p:cNvPicPr>
@@ -7387,7 +7387,7 @@
       <p:grpSpPr/>
       <p:pic>
         <p:nvPicPr>
-          <p:cNvPr id="2" name="Picture 1" descr="s3_0_png_8554.png"/>
+          <p:cNvPr id="2" name="Picture 1" descr="header-strip.png"/>
           <p:cNvPicPr>
             <a:picLocks noChangeAspect="1"/>
           </p:cNvPicPr>
@@ -7834,7 +7834,7 @@
       <p:grpSpPr/>
       <p:pic>
         <p:nvPicPr>
-          <p:cNvPr id="2" name="Picture 1" descr="s3_0_png_8554.png"/>
+          <p:cNvPr id="2" name="Picture 1" descr="header-strip.png"/>
           <p:cNvPicPr>
             <a:picLocks noChangeAspect="1"/>
           </p:cNvPicPr>
@@ -8539,7 +8539,7 @@
       <p:grpSpPr/>
       <p:pic>
         <p:nvPicPr>
-          <p:cNvPr id="2" name="Picture 1" descr="s3_0_png_8554.png"/>
+          <p:cNvPr id="2" name="Picture 1" descr="header-strip.png"/>
           <p:cNvPicPr>
             <a:picLocks noChangeAspect="1"/>
           </p:cNvPicPr>
@@ -8886,7 +8886,7 @@
       <p:grpSpPr/>
       <p:pic>
         <p:nvPicPr>
-          <p:cNvPr id="2" name="Picture 1" descr="s3_0_png_8554.png"/>
+          <p:cNvPr id="2" name="Picture 1" descr="header-strip.png"/>
           <p:cNvPicPr>
             <a:picLocks noChangeAspect="1"/>
           </p:cNvPicPr>
@@ -9543,7 +9543,7 @@
       <p:grpSpPr/>
       <p:pic>
         <p:nvPicPr>
-          <p:cNvPr id="2" name="Picture 1" descr="s3_0_png_8554.png"/>
+          <p:cNvPr id="2" name="Picture 1" descr="header-strip.png"/>
           <p:cNvPicPr>
             <a:picLocks noChangeAspect="1"/>
           </p:cNvPicPr>
@@ -9864,7 +9864,7 @@
                 </a:solidFill>
                 <a:latin typeface="Arial"/>
               </a:rPr>
-              <a:t>opens the full dashboard: fleet, operator log, agents panel, synthetic nodes included</a:t>
+              <a:t>the full dashboard: fleet, operator log, agents panel, synthetic nodes included</a:t>
             </a:r>
           </a:p>
         </p:txBody>
@@ -9877,8 +9877,8 @@
         </p:nvSpPr>
         <p:spPr>
           <a:xfrm>
-            <a:off x="2697480" y="2852928"/>
-            <a:ext cx="6126480" cy="502920"/>
+            <a:off x="2697480" y="2834640"/>
+            <a:ext cx="6126480" cy="731520"/>
           </a:xfrm>
           <a:prstGeom prst="rect">
             <a:avLst/>
@@ -9924,6 +9924,23 @@
               <a:t>&amp;projectId=01J0DEM0WARM000000000000AB&amp;synthetic=1&amp;dest=fleet</a:t>
             </a:r>
           </a:p>
+          <a:p>
+            <a:pPr algn="l">
+              <a:lnSpc>
+                <a:spcPct val="135000"/>
+              </a:lnSpc>
+            </a:pPr>
+            <a:r>
+              <a:rPr sz="800" b="0">
+                <a:solidFill>
+                  <a:srgbClr val="1A73E8"/>
+                </a:solidFill>
+                <a:latin typeface="Arial"/>
+                <a:hlinkClick r:id="rId4"/>
+              </a:rPr>
+              <a:t>&amp;token=demo-project-token</a:t>
+            </a:r>
+          </a:p>
         </p:txBody>
       </p:sp>
       <p:sp>
@@ -9934,8 +9951,8 @@
         </p:nvSpPr>
         <p:spPr>
           <a:xfrm>
-            <a:off x="265176" y="3611880"/>
-            <a:ext cx="2377440" cy="274320"/>
+            <a:off x="2697480" y="3657600"/>
+            <a:ext cx="6126480" cy="274320"/>
           </a:xfrm>
           <a:prstGeom prst="rect">
             <a:avLst/>
@@ -9954,13 +9971,13 @@
               </a:lnSpc>
             </a:pPr>
             <a:r>
-              <a:rPr sz="1050" b="1">
-                <a:solidFill>
-                  <a:srgbClr val="202124"/>
-                </a:solidFill>
-                <a:latin typeface="Arial"/>
-              </a:rPr>
-              <a:t>Demo sign-in</a:t>
+              <a:rPr sz="800" b="0">
+                <a:solidFill>
+                  <a:srgbClr val="5F6368"/>
+                </a:solidFill>
+                <a:latin typeface="Arial"/>
+              </a:rPr>
+              <a:t>the link signs this tab in, then strips the token from the address bar</a:t>
             </a:r>
           </a:p>
         </p:txBody>
@@ -9973,8 +9990,8 @@
         </p:nvSpPr>
         <p:spPr>
           <a:xfrm>
-            <a:off x="2697480" y="3611880"/>
-            <a:ext cx="6126480" cy="274320"/>
+            <a:off x="265176" y="4206240"/>
+            <a:ext cx="2377440" cy="274320"/>
           </a:xfrm>
           <a:prstGeom prst="rect">
             <a:avLst/>
@@ -9993,13 +10010,13 @@
               </a:lnSpc>
             </a:pPr>
             <a:r>
-              <a:rPr sz="1000" b="0">
+              <a:rPr sz="1050" b="1">
                 <a:solidFill>
                   <a:srgbClr val="202124"/>
                 </a:solidFill>
                 <a:latin typeface="Arial"/>
               </a:rPr>
-              <a:t>project token: demo-project-token</a:t>
+              <a:t>Live API</a:t>
             </a:r>
           </a:p>
         </p:txBody>
@@ -10012,85 +10029,7 @@
         </p:nvSpPr>
         <p:spPr>
           <a:xfrm>
-            <a:off x="2697480" y="3877056"/>
-            <a:ext cx="6126480" cy="274320"/>
-          </a:xfrm>
-          <a:prstGeom prst="rect">
-            <a:avLst/>
-          </a:prstGeom>
-          <a:noFill/>
-        </p:spPr>
-        <p:txBody>
-          <a:bodyPr wrap="square" lIns="0" rIns="0" tIns="0" bIns="0" anchor="t">
-            <a:spAutoFit/>
-          </a:bodyPr>
-          <a:lstStyle/>
-          <a:p>
-            <a:pPr algn="l">
-              <a:lnSpc>
-                <a:spcPct val="112000"/>
-              </a:lnSpc>
-            </a:pPr>
-            <a:r>
-              <a:rPr sz="800" b="0">
-                <a:solidFill>
-                  <a:srgbClr val="5F6368"/>
-                </a:solidFill>
-                <a:latin typeface="Arial"/>
-              </a:rPr>
-              <a:t>the dashboard refuses a token inside a URL, so the token is printed here; paste it at Settings, then sign in</a:t>
-            </a:r>
-          </a:p>
-        </p:txBody>
-      </p:sp>
-      <p:sp>
-        <p:nvSpPr>
-          <p:cNvPr id="15" name="TextBox 14"/>
-          <p:cNvSpPr txBox="1"/>
-          <p:nvPr/>
-        </p:nvSpPr>
-        <p:spPr>
-          <a:xfrm>
-            <a:off x="265176" y="4315968"/>
-            <a:ext cx="2377440" cy="274320"/>
-          </a:xfrm>
-          <a:prstGeom prst="rect">
-            <a:avLst/>
-          </a:prstGeom>
-          <a:noFill/>
-        </p:spPr>
-        <p:txBody>
-          <a:bodyPr wrap="square" lIns="0" rIns="0" tIns="0" bIns="0" anchor="t">
-            <a:spAutoFit/>
-          </a:bodyPr>
-          <a:lstStyle/>
-          <a:p>
-            <a:pPr algn="l">
-              <a:lnSpc>
-                <a:spcPct val="112000"/>
-              </a:lnSpc>
-            </a:pPr>
-            <a:r>
-              <a:rPr sz="1050" b="1">
-                <a:solidFill>
-                  <a:srgbClr val="202124"/>
-                </a:solidFill>
-                <a:latin typeface="Arial"/>
-              </a:rPr>
-              <a:t>Live API</a:t>
-            </a:r>
-          </a:p>
-        </p:txBody>
-      </p:sp>
-      <p:sp>
-        <p:nvSpPr>
-          <p:cNvPr id="16" name="TextBox 15"/>
-          <p:cNvSpPr txBox="1"/>
-          <p:nvPr/>
-        </p:nvSpPr>
-        <p:spPr>
-          <a:xfrm>
-            <a:off x="2697480" y="4315968"/>
+            <a:off x="2697480" y="4206240"/>
             <a:ext cx="6126480" cy="274320"/>
           </a:xfrm>
           <a:prstGeom prst="rect">
@@ -10142,7 +10081,7 @@
       <p:grpSpPr/>
       <p:pic>
         <p:nvPicPr>
-          <p:cNvPr id="2" name="Picture 1" descr="s16_1_png_186669.png"/>
+          <p:cNvPr id="2" name="Picture 1" descr="closing.png"/>
           <p:cNvPicPr>
             <a:picLocks noChangeAspect="1"/>
           </p:cNvPicPr>
@@ -10278,7 +10217,7 @@
       <p:grpSpPr/>
       <p:pic>
         <p:nvPicPr>
-          <p:cNvPr id="2" name="Picture 1" descr="s3_0_png_8554.png"/>
+          <p:cNvPr id="2" name="Picture 1" descr="header-strip.png"/>
           <p:cNvPicPr>
             <a:picLocks noChangeAspect="1"/>
           </p:cNvPicPr>
@@ -10886,7 +10825,7 @@
       <p:grpSpPr/>
       <p:pic>
         <p:nvPicPr>
-          <p:cNvPr id="2" name="Picture 1" descr="s3_0_png_8554.png"/>
+          <p:cNvPr id="2" name="Picture 1" descr="header-strip.png"/>
           <p:cNvPicPr>
             <a:picLocks noChangeAspect="1"/>
           </p:cNvPicPr>
@@ -11895,7 +11834,7 @@
       <p:grpSpPr/>
       <p:pic>
         <p:nvPicPr>
-          <p:cNvPr id="2" name="Picture 1" descr="s3_0_png_8554.png"/>
+          <p:cNvPr id="2" name="Picture 1" descr="header-strip.png"/>
           <p:cNvPicPr>
             <a:picLocks noChangeAspect="1"/>
           </p:cNvPicPr>
@@ -12486,7 +12425,7 @@
       <p:grpSpPr/>
       <p:pic>
         <p:nvPicPr>
-          <p:cNvPr id="2" name="Picture 1" descr="s3_0_png_8554.png"/>
+          <p:cNvPr id="2" name="Picture 1" descr="header-strip.png"/>
           <p:cNvPicPr>
             <a:picLocks noChangeAspect="1"/>
           </p:cNvPicPr>
@@ -13477,7 +13416,7 @@
       <p:grpSpPr/>
       <p:pic>
         <p:nvPicPr>
-          <p:cNvPr id="2" name="Picture 1" descr="s3_0_png_8554.png"/>
+          <p:cNvPr id="2" name="Picture 1" descr="header-strip.png"/>
           <p:cNvPicPr>
             <a:picLocks noChangeAspect="1"/>
           </p:cNvPicPr>
@@ -14731,7 +14670,7 @@
       <p:grpSpPr/>
       <p:pic>
         <p:nvPicPr>
-          <p:cNvPr id="2" name="Picture 1" descr="s3_0_png_8554.png"/>
+          <p:cNvPr id="2" name="Picture 1" descr="header-strip.png"/>
           <p:cNvPicPr>
             <a:picLocks noChangeAspect="1"/>
           </p:cNvPicPr>
@@ -15268,7 +15207,7 @@
       <p:grpSpPr/>
       <p:pic>
         <p:nvPicPr>
-          <p:cNvPr id="2" name="Picture 1" descr="s3_0_png_8554.png"/>
+          <p:cNvPr id="2" name="Picture 1" descr="header-strip.png"/>
           <p:cNvPicPr>
             <a:picLocks noChangeAspect="1"/>
           </p:cNvPicPr>
@@ -15811,7 +15750,7 @@
       <p:grpSpPr/>
       <p:pic>
         <p:nvPicPr>
-          <p:cNvPr id="2" name="Picture 1" descr="s3_0_png_8554.png"/>
+          <p:cNvPr id="2" name="Picture 1" descr="header-strip.png"/>
           <p:cNvPicPr>
             <a:picLocks noChangeAspect="1"/>
           </p:cNvPicPr>
